--- a/wso2-con-2026/img/openness-ladder.pptx
+++ b/wso2-con-2026/img/openness-ladder.pptx
@@ -6966,7 +6966,7 @@
           <p:nvPr>
             <p:extLst>
               <p:ext uri="{D42A27DB-BD31-4B8C-83A1-F6EECF244321}">
-                <p14:modId xmlns:p14="http://schemas.microsoft.com/office/powerpoint/2010/main" val="814572513"/>
+                <p14:modId xmlns:p14="http://schemas.microsoft.com/office/powerpoint/2010/main" val="1030323025"/>
               </p:ext>
             </p:extLst>
           </p:nvPr>
@@ -6981,6 +6981,105 @@
           </a:graphicData>
         </a:graphic>
       </p:graphicFrame>
+      <p:sp>
+        <p:nvSpPr>
+          <p:cNvPr id="6" name="Right Arrow 5">
+            <a:extLst>
+              <a:ext uri="{FF2B5EF4-FFF2-40B4-BE49-F238E27FC236}">
+                <a16:creationId xmlns:a16="http://schemas.microsoft.com/office/drawing/2014/main" id="{9E2BBD86-5900-B2DF-57A1-56A0E05723B5}"/>
+              </a:ext>
+            </a:extLst>
+          </p:cNvPr>
+          <p:cNvSpPr/>
+          <p:nvPr/>
+        </p:nvSpPr>
+        <p:spPr>
+          <a:xfrm>
+            <a:off x="1726609" y="1127051"/>
+            <a:ext cx="8738781" cy="818707"/>
+          </a:xfrm>
+          <a:prstGeom prst="rightArrow">
+            <a:avLst/>
+          </a:prstGeom>
+        </p:spPr>
+        <p:style>
+          <a:lnRef idx="2">
+            <a:schemeClr val="accent1">
+              <a:shade val="15000"/>
+            </a:schemeClr>
+          </a:lnRef>
+          <a:fillRef idx="1">
+            <a:schemeClr val="accent1"/>
+          </a:fillRef>
+          <a:effectRef idx="0">
+            <a:schemeClr val="accent1"/>
+          </a:effectRef>
+          <a:fontRef idx="minor">
+            <a:schemeClr val="lt1"/>
+          </a:fontRef>
+        </p:style>
+        <p:txBody>
+          <a:bodyPr rtlCol="0" anchor="ctr"/>
+          <a:lstStyle/>
+          <a:p>
+            <a:pPr algn="ctr"/>
+            <a:r>
+              <a:rPr lang="en-CH" dirty="0"/>
+              <a:t>Insight into the Product</a:t>
+            </a:r>
+          </a:p>
+        </p:txBody>
+      </p:sp>
+      <p:sp>
+        <p:nvSpPr>
+          <p:cNvPr id="7" name="Right Arrow 6">
+            <a:extLst>
+              <a:ext uri="{FF2B5EF4-FFF2-40B4-BE49-F238E27FC236}">
+                <a16:creationId xmlns:a16="http://schemas.microsoft.com/office/drawing/2014/main" id="{3CD775DA-F94D-A4DB-3E0A-62DF91C777D5}"/>
+              </a:ext>
+            </a:extLst>
+          </p:cNvPr>
+          <p:cNvSpPr/>
+          <p:nvPr/>
+        </p:nvSpPr>
+        <p:spPr>
+          <a:xfrm>
+            <a:off x="1726609" y="5064641"/>
+            <a:ext cx="8738781" cy="818707"/>
+          </a:xfrm>
+          <a:prstGeom prst="rightArrow">
+            <a:avLst/>
+          </a:prstGeom>
+        </p:spPr>
+        <p:style>
+          <a:lnRef idx="2">
+            <a:schemeClr val="accent1">
+              <a:shade val="15000"/>
+            </a:schemeClr>
+          </a:lnRef>
+          <a:fillRef idx="1">
+            <a:schemeClr val="accent1"/>
+          </a:fillRef>
+          <a:effectRef idx="0">
+            <a:schemeClr val="accent1"/>
+          </a:effectRef>
+          <a:fontRef idx="minor">
+            <a:schemeClr val="lt1"/>
+          </a:fontRef>
+        </p:style>
+        <p:txBody>
+          <a:bodyPr rtlCol="0" anchor="ctr"/>
+          <a:lstStyle/>
+          <a:p>
+            <a:pPr algn="ctr"/>
+            <a:r>
+              <a:rPr lang="en-CH"/>
+              <a:t>Optionality Value</a:t>
+            </a:r>
+            <a:endParaRPr lang="en-CH" dirty="0"/>
+          </a:p>
+        </p:txBody>
+      </p:sp>
     </p:spTree>
     <p:extLst>
       <p:ext uri="{BB962C8B-B14F-4D97-AF65-F5344CB8AC3E}">

--- a/wso2-con-2026/img/openness-ladder.pptx
+++ b/wso2-con-2026/img/openness-ladder.pptx
@@ -883,10 +883,12 @@
             </a:defRPr>
           </a:pPr>
           <a:r>
-            <a:rPr lang="en-GB"/>
+            <a:rPr lang="en-GB" dirty="0">
+              <a:latin typeface="Sora" pitchFamily="2" charset="0"/>
+              <a:cs typeface="Sora" pitchFamily="2" charset="0"/>
+            </a:rPr>
             <a:t>Closed Product</a:t>
           </a:r>
-          <a:endParaRPr lang="en-GB" dirty="0"/>
         </a:p>
       </dgm:t>
     </dgm:pt>
@@ -897,7 +899,10 @@
         <a:bodyPr/>
         <a:lstStyle/>
         <a:p>
-          <a:endParaRPr lang="en-GB"/>
+          <a:endParaRPr lang="en-GB">
+            <a:latin typeface="Sora" pitchFamily="2" charset="0"/>
+            <a:cs typeface="Sora" pitchFamily="2" charset="0"/>
+          </a:endParaRPr>
         </a:p>
       </dgm:t>
     </dgm:pt>
@@ -908,7 +913,10 @@
         <a:bodyPr/>
         <a:lstStyle/>
         <a:p>
-          <a:endParaRPr lang="en-GB"/>
+          <a:endParaRPr lang="en-GB">
+            <a:latin typeface="Sora" pitchFamily="2" charset="0"/>
+            <a:cs typeface="Sora" pitchFamily="2" charset="0"/>
+          </a:endParaRPr>
         </a:p>
       </dgm:t>
     </dgm:pt>
@@ -920,7 +928,10 @@
         <a:lstStyle/>
         <a:p>
           <a:r>
-            <a:rPr lang="en-GB" dirty="0"/>
+            <a:rPr lang="en-GB" dirty="0">
+              <a:latin typeface="Sora" pitchFamily="2" charset="0"/>
+              <a:cs typeface="Sora" pitchFamily="2" charset="0"/>
+            </a:rPr>
             <a:t>You can integrate and recombine</a:t>
           </a:r>
         </a:p>
@@ -933,7 +944,10 @@
         <a:bodyPr/>
         <a:lstStyle/>
         <a:p>
-          <a:endParaRPr lang="en-GB"/>
+          <a:endParaRPr lang="en-GB">
+            <a:latin typeface="Sora" pitchFamily="2" charset="0"/>
+            <a:cs typeface="Sora" pitchFamily="2" charset="0"/>
+          </a:endParaRPr>
         </a:p>
       </dgm:t>
     </dgm:pt>
@@ -944,7 +958,10 @@
         <a:bodyPr/>
         <a:lstStyle/>
         <a:p>
-          <a:endParaRPr lang="en-GB"/>
+          <a:endParaRPr lang="en-GB">
+            <a:latin typeface="Sora" pitchFamily="2" charset="0"/>
+            <a:cs typeface="Sora" pitchFamily="2" charset="0"/>
+          </a:endParaRPr>
         </a:p>
       </dgm:t>
     </dgm:pt>
@@ -956,7 +973,10 @@
         <a:lstStyle/>
         <a:p>
           <a:r>
-            <a:rPr lang="en-GB" dirty="0"/>
+            <a:rPr lang="en-GB" dirty="0">
+              <a:latin typeface="Sora" pitchFamily="2" charset="0"/>
+              <a:cs typeface="Sora" pitchFamily="2" charset="0"/>
+            </a:rPr>
             <a:t>Mix and remix as you need</a:t>
           </a:r>
         </a:p>
@@ -969,7 +989,10 @@
         <a:bodyPr/>
         <a:lstStyle/>
         <a:p>
-          <a:endParaRPr lang="en-GB"/>
+          <a:endParaRPr lang="en-GB">
+            <a:latin typeface="Sora" pitchFamily="2" charset="0"/>
+            <a:cs typeface="Sora" pitchFamily="2" charset="0"/>
+          </a:endParaRPr>
         </a:p>
       </dgm:t>
     </dgm:pt>
@@ -980,7 +1003,10 @@
         <a:bodyPr/>
         <a:lstStyle/>
         <a:p>
-          <a:endParaRPr lang="en-GB"/>
+          <a:endParaRPr lang="en-GB">
+            <a:latin typeface="Sora" pitchFamily="2" charset="0"/>
+            <a:cs typeface="Sora" pitchFamily="2" charset="0"/>
+          </a:endParaRPr>
         </a:p>
       </dgm:t>
     </dgm:pt>
@@ -999,7 +1025,10 @@
             </a:defRPr>
           </a:pPr>
           <a:r>
-            <a:rPr lang="en-GB" dirty="0"/>
+            <a:rPr lang="en-GB" dirty="0">
+              <a:latin typeface="Sora" pitchFamily="2" charset="0"/>
+              <a:cs typeface="Sora" pitchFamily="2" charset="0"/>
+            </a:rPr>
             <a:t>Open Weights</a:t>
           </a:r>
         </a:p>
@@ -1012,7 +1041,10 @@
         <a:bodyPr/>
         <a:lstStyle/>
         <a:p>
-          <a:endParaRPr lang="en-GB"/>
+          <a:endParaRPr lang="en-GB">
+            <a:latin typeface="Sora" pitchFamily="2" charset="0"/>
+            <a:cs typeface="Sora" pitchFamily="2" charset="0"/>
+          </a:endParaRPr>
         </a:p>
       </dgm:t>
     </dgm:pt>
@@ -1023,7 +1055,10 @@
         <a:bodyPr/>
         <a:lstStyle/>
         <a:p>
-          <a:endParaRPr lang="en-GB"/>
+          <a:endParaRPr lang="en-GB">
+            <a:latin typeface="Sora" pitchFamily="2" charset="0"/>
+            <a:cs typeface="Sora" pitchFamily="2" charset="0"/>
+          </a:endParaRPr>
         </a:p>
       </dgm:t>
     </dgm:pt>
@@ -1035,7 +1070,10 @@
         <a:lstStyle/>
         <a:p>
           <a:r>
-            <a:rPr lang="en-GB" dirty="0"/>
+            <a:rPr lang="en-GB" dirty="0">
+              <a:latin typeface="Sora" pitchFamily="2" charset="0"/>
+              <a:cs typeface="Sora" pitchFamily="2" charset="0"/>
+            </a:rPr>
             <a:t>Freedom to change anything</a:t>
           </a:r>
         </a:p>
@@ -1048,7 +1086,10 @@
         <a:bodyPr/>
         <a:lstStyle/>
         <a:p>
-          <a:endParaRPr lang="en-GB"/>
+          <a:endParaRPr lang="en-GB">
+            <a:latin typeface="Sora" pitchFamily="2" charset="0"/>
+            <a:cs typeface="Sora" pitchFamily="2" charset="0"/>
+          </a:endParaRPr>
         </a:p>
       </dgm:t>
     </dgm:pt>
@@ -1059,7 +1100,10 @@
         <a:bodyPr/>
         <a:lstStyle/>
         <a:p>
-          <a:endParaRPr lang="en-GB"/>
+          <a:endParaRPr lang="en-GB">
+            <a:latin typeface="Sora" pitchFamily="2" charset="0"/>
+            <a:cs typeface="Sora" pitchFamily="2" charset="0"/>
+          </a:endParaRPr>
         </a:p>
       </dgm:t>
     </dgm:pt>
@@ -1071,7 +1115,10 @@
         <a:lstStyle/>
         <a:p>
           <a:r>
-            <a:rPr lang="en-GB" dirty="0"/>
+            <a:rPr lang="en-GB" dirty="0">
+              <a:latin typeface="Sora" pitchFamily="2" charset="0"/>
+              <a:cs typeface="Sora" pitchFamily="2" charset="0"/>
+            </a:rPr>
             <a:t>Ideal if available</a:t>
           </a:r>
         </a:p>
@@ -1084,7 +1131,10 @@
         <a:bodyPr/>
         <a:lstStyle/>
         <a:p>
-          <a:endParaRPr lang="en-GB"/>
+          <a:endParaRPr lang="en-GB">
+            <a:latin typeface="Sora" pitchFamily="2" charset="0"/>
+            <a:cs typeface="Sora" pitchFamily="2" charset="0"/>
+          </a:endParaRPr>
         </a:p>
       </dgm:t>
     </dgm:pt>
@@ -1095,7 +1145,10 @@
         <a:bodyPr/>
         <a:lstStyle/>
         <a:p>
-          <a:endParaRPr lang="en-GB"/>
+          <a:endParaRPr lang="en-GB">
+            <a:latin typeface="Sora" pitchFamily="2" charset="0"/>
+            <a:cs typeface="Sora" pitchFamily="2" charset="0"/>
+          </a:endParaRPr>
         </a:p>
       </dgm:t>
     </dgm:pt>
@@ -1107,7 +1160,10 @@
         <a:lstStyle/>
         <a:p>
           <a:r>
-            <a:rPr lang="en-GB" dirty="0"/>
+            <a:rPr lang="en-GB" dirty="0">
+              <a:latin typeface="Sora" pitchFamily="2" charset="0"/>
+              <a:cs typeface="Sora" pitchFamily="2" charset="0"/>
+            </a:rPr>
             <a:t>You can tweak and tinker</a:t>
           </a:r>
         </a:p>
@@ -1120,7 +1176,10 @@
         <a:bodyPr/>
         <a:lstStyle/>
         <a:p>
-          <a:endParaRPr lang="en-GB"/>
+          <a:endParaRPr lang="en-GB">
+            <a:latin typeface="Sora" pitchFamily="2" charset="0"/>
+            <a:cs typeface="Sora" pitchFamily="2" charset="0"/>
+          </a:endParaRPr>
         </a:p>
       </dgm:t>
     </dgm:pt>
@@ -1131,7 +1190,10 @@
         <a:bodyPr/>
         <a:lstStyle/>
         <a:p>
-          <a:endParaRPr lang="en-GB"/>
+          <a:endParaRPr lang="en-GB">
+            <a:latin typeface="Sora" pitchFamily="2" charset="0"/>
+            <a:cs typeface="Sora" pitchFamily="2" charset="0"/>
+          </a:endParaRPr>
         </a:p>
       </dgm:t>
     </dgm:pt>
@@ -1143,7 +1205,10 @@
         <a:lstStyle/>
         <a:p>
           <a:r>
-            <a:rPr lang="en-GB" dirty="0"/>
+            <a:rPr lang="en-GB" dirty="0">
+              <a:latin typeface="Sora" pitchFamily="2" charset="0"/>
+              <a:cs typeface="Sora" pitchFamily="2" charset="0"/>
+            </a:rPr>
             <a:t>Sometimes it's all you need</a:t>
           </a:r>
         </a:p>
@@ -1156,7 +1221,10 @@
         <a:bodyPr/>
         <a:lstStyle/>
         <a:p>
-          <a:endParaRPr lang="en-GB"/>
+          <a:endParaRPr lang="en-GB">
+            <a:latin typeface="Sora" pitchFamily="2" charset="0"/>
+            <a:cs typeface="Sora" pitchFamily="2" charset="0"/>
+          </a:endParaRPr>
         </a:p>
       </dgm:t>
     </dgm:pt>
@@ -1167,7 +1235,10 @@
         <a:bodyPr/>
         <a:lstStyle/>
         <a:p>
-          <a:endParaRPr lang="en-GB"/>
+          <a:endParaRPr lang="en-GB">
+            <a:latin typeface="Sora" pitchFamily="2" charset="0"/>
+            <a:cs typeface="Sora" pitchFamily="2" charset="0"/>
+          </a:endParaRPr>
         </a:p>
       </dgm:t>
     </dgm:pt>
@@ -1186,11 +1257,17 @@
             </a:defRPr>
           </a:pPr>
           <a:r>
-            <a:rPr lang="en-GB"/>
+            <a:rPr lang="en-GB">
+              <a:latin typeface="Sora" pitchFamily="2" charset="0"/>
+              <a:cs typeface="Sora" pitchFamily="2" charset="0"/>
+            </a:rPr>
             <a:t>Open </a:t>
           </a:r>
           <a:r>
-            <a:rPr lang="en-GB" dirty="0"/>
+            <a:rPr lang="en-GB" dirty="0">
+              <a:latin typeface="Sora" pitchFamily="2" charset="0"/>
+              <a:cs typeface="Sora" pitchFamily="2" charset="0"/>
+            </a:rPr>
             <a:t>Source</a:t>
           </a:r>
         </a:p>
@@ -1203,7 +1280,10 @@
         <a:bodyPr/>
         <a:lstStyle/>
         <a:p>
-          <a:endParaRPr lang="en-GB"/>
+          <a:endParaRPr lang="en-GB">
+            <a:latin typeface="Sora" pitchFamily="2" charset="0"/>
+            <a:cs typeface="Sora" pitchFamily="2" charset="0"/>
+          </a:endParaRPr>
         </a:p>
       </dgm:t>
     </dgm:pt>
@@ -1214,7 +1294,10 @@
         <a:bodyPr/>
         <a:lstStyle/>
         <a:p>
-          <a:endParaRPr lang="en-GB"/>
+          <a:endParaRPr lang="en-GB">
+            <a:latin typeface="Sora" pitchFamily="2" charset="0"/>
+            <a:cs typeface="Sora" pitchFamily="2" charset="0"/>
+          </a:endParaRPr>
         </a:p>
       </dgm:t>
     </dgm:pt>
@@ -1226,7 +1309,10 @@
         <a:lstStyle/>
         <a:p>
           <a:r>
-            <a:rPr lang="en-GB" dirty="0"/>
+            <a:rPr lang="en-GB" dirty="0">
+              <a:latin typeface="Sora" pitchFamily="2" charset="0"/>
+              <a:cs typeface="Sora" pitchFamily="2" charset="0"/>
+            </a:rPr>
             <a:t>You get what you get</a:t>
           </a:r>
         </a:p>
@@ -1239,7 +1325,10 @@
         <a:bodyPr/>
         <a:lstStyle/>
         <a:p>
-          <a:endParaRPr lang="en-GB"/>
+          <a:endParaRPr lang="en-GB">
+            <a:latin typeface="Sora" pitchFamily="2" charset="0"/>
+            <a:cs typeface="Sora" pitchFamily="2" charset="0"/>
+          </a:endParaRPr>
         </a:p>
       </dgm:t>
     </dgm:pt>
@@ -1250,7 +1339,10 @@
         <a:bodyPr/>
         <a:lstStyle/>
         <a:p>
-          <a:endParaRPr lang="en-GB"/>
+          <a:endParaRPr lang="en-GB">
+            <a:latin typeface="Sora" pitchFamily="2" charset="0"/>
+            <a:cs typeface="Sora" pitchFamily="2" charset="0"/>
+          </a:endParaRPr>
         </a:p>
       </dgm:t>
     </dgm:pt>
@@ -1262,7 +1354,10 @@
         <a:lstStyle/>
         <a:p>
           <a:r>
-            <a:rPr lang="en-GB" dirty="0"/>
+            <a:rPr lang="en-GB" dirty="0">
+              <a:latin typeface="Sora" pitchFamily="2" charset="0"/>
+              <a:cs typeface="Sora" pitchFamily="2" charset="0"/>
+            </a:rPr>
             <a:t>Hard constraint on your optionality</a:t>
           </a:r>
         </a:p>
@@ -1275,7 +1370,10 @@
         <a:bodyPr/>
         <a:lstStyle/>
         <a:p>
-          <a:endParaRPr lang="en-GB"/>
+          <a:endParaRPr lang="en-GB">
+            <a:latin typeface="Sora" pitchFamily="2" charset="0"/>
+            <a:cs typeface="Sora" pitchFamily="2" charset="0"/>
+          </a:endParaRPr>
         </a:p>
       </dgm:t>
     </dgm:pt>
@@ -1286,7 +1384,10 @@
         <a:bodyPr/>
         <a:lstStyle/>
         <a:p>
-          <a:endParaRPr lang="en-GB"/>
+          <a:endParaRPr lang="en-GB">
+            <a:latin typeface="Sora" pitchFamily="2" charset="0"/>
+            <a:cs typeface="Sora" pitchFamily="2" charset="0"/>
+          </a:endParaRPr>
         </a:p>
       </dgm:t>
     </dgm:pt>
@@ -1305,11 +1406,17 @@
             </a:defRPr>
           </a:pPr>
           <a:r>
-            <a:rPr lang="en-GB"/>
+            <a:rPr lang="en-GB">
+              <a:latin typeface="Sora" pitchFamily="2" charset="0"/>
+              <a:cs typeface="Sora" pitchFamily="2" charset="0"/>
+            </a:rPr>
             <a:t>Open </a:t>
           </a:r>
           <a:r>
-            <a:rPr lang="en-GB" dirty="0"/>
+            <a:rPr lang="en-GB" dirty="0">
+              <a:latin typeface="Sora" pitchFamily="2" charset="0"/>
+              <a:cs typeface="Sora" pitchFamily="2" charset="0"/>
+            </a:rPr>
             <a:t>Interfaces</a:t>
           </a:r>
         </a:p>
@@ -1322,7 +1429,10 @@
         <a:bodyPr/>
         <a:lstStyle/>
         <a:p>
-          <a:endParaRPr lang="en-GB"/>
+          <a:endParaRPr lang="en-GB">
+            <a:latin typeface="Sora" pitchFamily="2" charset="0"/>
+            <a:cs typeface="Sora" pitchFamily="2" charset="0"/>
+          </a:endParaRPr>
         </a:p>
       </dgm:t>
     </dgm:pt>
@@ -1333,7 +1443,10 @@
         <a:bodyPr/>
         <a:lstStyle/>
         <a:p>
-          <a:endParaRPr lang="en-GB"/>
+          <a:endParaRPr lang="en-GB">
+            <a:latin typeface="Sora" pitchFamily="2" charset="0"/>
+            <a:cs typeface="Sora" pitchFamily="2" charset="0"/>
+          </a:endParaRPr>
         </a:p>
       </dgm:t>
     </dgm:pt>
@@ -1584,8 +1697,8 @@
       </dsp:nvSpPr>
       <dsp:spPr>
         <a:xfrm>
-          <a:off x="162560" y="2592832"/>
-          <a:ext cx="7802880" cy="16256"/>
+          <a:off x="201380" y="2590891"/>
+          <a:ext cx="9666271" cy="20138"/>
         </a:xfrm>
         <a:prstGeom prst="rect">
           <a:avLst/>
@@ -1630,8 +1743,8 @@
       </dsp:nvSpPr>
       <dsp:spPr>
         <a:xfrm>
-          <a:off x="166465" y="531029"/>
-          <a:ext cx="1878330" cy="1658112"/>
+          <a:off x="206218" y="531029"/>
+          <a:ext cx="2326890" cy="1658112"/>
         </a:xfrm>
         <a:prstGeom prst="rect">
           <a:avLst/>
@@ -1679,15 +1792,17 @@
             </a:defRPr>
           </a:pPr>
           <a:r>
-            <a:rPr lang="en-GB" sz="2800" kern="1200"/>
+            <a:rPr lang="en-GB" sz="2800" kern="1200" dirty="0">
+              <a:latin typeface="Sora" pitchFamily="2" charset="0"/>
+              <a:cs typeface="Sora" pitchFamily="2" charset="0"/>
+            </a:rPr>
             <a:t>Closed Product</a:t>
           </a:r>
-          <a:endParaRPr lang="en-GB" sz="2800" kern="1200" dirty="0"/>
         </a:p>
       </dsp:txBody>
       <dsp:txXfrm>
-        <a:off x="166465" y="531029"/>
-        <a:ext cx="1878330" cy="1658112"/>
+        <a:off x="206218" y="531029"/>
+        <a:ext cx="2326890" cy="1658112"/>
       </dsp:txXfrm>
     </dsp:sp>
     <dsp:sp modelId="{EA387B10-CE86-4642-B40A-F1B3A204E573}">
@@ -1697,7 +1812,7 @@
       </dsp:nvSpPr>
       <dsp:spPr>
         <a:xfrm>
-          <a:off x="1008094" y="2503424"/>
+          <a:off x="1272127" y="2503424"/>
           <a:ext cx="195072" cy="195072"/>
         </a:xfrm>
         <a:prstGeom prst="ellipse">
@@ -1747,8 +1862,8 @@
       </dsp:nvSpPr>
       <dsp:spPr>
         <a:xfrm>
-          <a:off x="166465" y="3018197"/>
-          <a:ext cx="1878330" cy="2400469"/>
+          <a:off x="206218" y="3018197"/>
+          <a:ext cx="2326890" cy="2400469"/>
         </a:xfrm>
         <a:prstGeom prst="rect">
           <a:avLst/>
@@ -1791,7 +1906,10 @@
             <a:buNone/>
           </a:pPr>
           <a:r>
-            <a:rPr lang="en-GB" sz="1800" kern="1200" dirty="0"/>
+            <a:rPr lang="en-GB" sz="1800" kern="1200" dirty="0">
+              <a:latin typeface="Sora" pitchFamily="2" charset="0"/>
+              <a:cs typeface="Sora" pitchFamily="2" charset="0"/>
+            </a:rPr>
             <a:t>You get what you get</a:t>
           </a:r>
         </a:p>
@@ -1809,14 +1927,17 @@
             <a:buNone/>
           </a:pPr>
           <a:r>
-            <a:rPr lang="en-GB" sz="1800" kern="1200" dirty="0"/>
+            <a:rPr lang="en-GB" sz="1800" kern="1200" dirty="0">
+              <a:latin typeface="Sora" pitchFamily="2" charset="0"/>
+              <a:cs typeface="Sora" pitchFamily="2" charset="0"/>
+            </a:rPr>
             <a:t>Hard constraint on your optionality</a:t>
           </a:r>
         </a:p>
       </dsp:txBody>
       <dsp:txXfrm>
-        <a:off x="166465" y="3018197"/>
-        <a:ext cx="1878330" cy="2400469"/>
+        <a:off x="206218" y="3018197"/>
+        <a:ext cx="2326890" cy="2400469"/>
       </dsp:txXfrm>
     </dsp:sp>
     <dsp:sp modelId="{D4344FD5-7B43-C444-8694-4F5EF71F997B}">
@@ -1826,8 +1947,8 @@
       </dsp:nvSpPr>
       <dsp:spPr>
         <a:xfrm>
-          <a:off x="2138711" y="531029"/>
-          <a:ext cx="1878330" cy="1658112"/>
+          <a:off x="2649453" y="531029"/>
+          <a:ext cx="2326890" cy="1658112"/>
         </a:xfrm>
         <a:prstGeom prst="rect">
           <a:avLst/>
@@ -1875,18 +1996,24 @@
             </a:defRPr>
           </a:pPr>
           <a:r>
-            <a:rPr lang="en-GB" sz="2800" kern="1200"/>
+            <a:rPr lang="en-GB" sz="2800" kern="1200">
+              <a:latin typeface="Sora" pitchFamily="2" charset="0"/>
+              <a:cs typeface="Sora" pitchFamily="2" charset="0"/>
+            </a:rPr>
             <a:t>Open </a:t>
           </a:r>
           <a:r>
-            <a:rPr lang="en-GB" sz="2800" kern="1200" dirty="0"/>
+            <a:rPr lang="en-GB" sz="2800" kern="1200" dirty="0">
+              <a:latin typeface="Sora" pitchFamily="2" charset="0"/>
+              <a:cs typeface="Sora" pitchFamily="2" charset="0"/>
+            </a:rPr>
             <a:t>Interfaces</a:t>
           </a:r>
         </a:p>
       </dsp:txBody>
       <dsp:txXfrm>
-        <a:off x="2138711" y="531029"/>
-        <a:ext cx="1878330" cy="1658112"/>
+        <a:off x="2649453" y="531029"/>
+        <a:ext cx="2326890" cy="1658112"/>
       </dsp:txXfrm>
     </dsp:sp>
     <dsp:sp modelId="{1B3B5306-566F-5A45-A5E9-BE5D4FF79548}">
@@ -1896,7 +2023,7 @@
       </dsp:nvSpPr>
       <dsp:spPr>
         <a:xfrm>
-          <a:off x="2980340" y="2503424"/>
+          <a:off x="3715362" y="2503424"/>
           <a:ext cx="195072" cy="195072"/>
         </a:xfrm>
         <a:prstGeom prst="ellipse">
@@ -1946,8 +2073,8 @@
       </dsp:nvSpPr>
       <dsp:spPr>
         <a:xfrm>
-          <a:off x="2138711" y="3018197"/>
-          <a:ext cx="1878330" cy="2400469"/>
+          <a:off x="2649453" y="3018197"/>
+          <a:ext cx="2326890" cy="2400469"/>
         </a:xfrm>
         <a:prstGeom prst="rect">
           <a:avLst/>
@@ -1990,7 +2117,10 @@
             <a:buNone/>
           </a:pPr>
           <a:r>
-            <a:rPr lang="en-GB" sz="1800" kern="1200" dirty="0"/>
+            <a:rPr lang="en-GB" sz="1800" kern="1200" dirty="0">
+              <a:latin typeface="Sora" pitchFamily="2" charset="0"/>
+              <a:cs typeface="Sora" pitchFamily="2" charset="0"/>
+            </a:rPr>
             <a:t>You can integrate and recombine</a:t>
           </a:r>
         </a:p>
@@ -2008,14 +2138,17 @@
             <a:buNone/>
           </a:pPr>
           <a:r>
-            <a:rPr lang="en-GB" sz="1800" kern="1200" dirty="0"/>
+            <a:rPr lang="en-GB" sz="1800" kern="1200" dirty="0">
+              <a:latin typeface="Sora" pitchFamily="2" charset="0"/>
+              <a:cs typeface="Sora" pitchFamily="2" charset="0"/>
+            </a:rPr>
             <a:t>Mix and remix as you need</a:t>
           </a:r>
         </a:p>
       </dsp:txBody>
       <dsp:txXfrm>
-        <a:off x="2138711" y="3018197"/>
-        <a:ext cx="1878330" cy="2400469"/>
+        <a:off x="2649453" y="3018197"/>
+        <a:ext cx="2326890" cy="2400469"/>
       </dsp:txXfrm>
     </dsp:sp>
     <dsp:sp modelId="{F1805F63-3006-4244-B645-7E9C8D8C4429}">
@@ -2025,8 +2158,8 @@
       </dsp:nvSpPr>
       <dsp:spPr>
         <a:xfrm>
-          <a:off x="4110958" y="531029"/>
-          <a:ext cx="1878330" cy="1658112"/>
+          <a:off x="5092688" y="531029"/>
+          <a:ext cx="2326890" cy="1658112"/>
         </a:xfrm>
         <a:prstGeom prst="rect">
           <a:avLst/>
@@ -2074,14 +2207,17 @@
             </a:defRPr>
           </a:pPr>
           <a:r>
-            <a:rPr lang="en-GB" sz="2800" kern="1200" dirty="0"/>
+            <a:rPr lang="en-GB" sz="2800" kern="1200" dirty="0">
+              <a:latin typeface="Sora" pitchFamily="2" charset="0"/>
+              <a:cs typeface="Sora" pitchFamily="2" charset="0"/>
+            </a:rPr>
             <a:t>Open Weights</a:t>
           </a:r>
         </a:p>
       </dsp:txBody>
       <dsp:txXfrm>
-        <a:off x="4110958" y="531029"/>
-        <a:ext cx="1878330" cy="1658112"/>
+        <a:off x="5092688" y="531029"/>
+        <a:ext cx="2326890" cy="1658112"/>
       </dsp:txXfrm>
     </dsp:sp>
     <dsp:sp modelId="{34C6DBCF-013C-A049-9B36-F3539FEE2E49}">
@@ -2091,7 +2227,7 @@
       </dsp:nvSpPr>
       <dsp:spPr>
         <a:xfrm>
-          <a:off x="4952587" y="2503424"/>
+          <a:off x="6158598" y="2503424"/>
           <a:ext cx="195072" cy="195072"/>
         </a:xfrm>
         <a:prstGeom prst="ellipse">
@@ -2141,8 +2277,8 @@
       </dsp:nvSpPr>
       <dsp:spPr>
         <a:xfrm>
-          <a:off x="4110958" y="3018197"/>
-          <a:ext cx="1878330" cy="2400469"/>
+          <a:off x="5092688" y="3018197"/>
+          <a:ext cx="2326890" cy="2400469"/>
         </a:xfrm>
         <a:prstGeom prst="rect">
           <a:avLst/>
@@ -2185,7 +2321,10 @@
             <a:buNone/>
           </a:pPr>
           <a:r>
-            <a:rPr lang="en-GB" sz="1800" kern="1200" dirty="0"/>
+            <a:rPr lang="en-GB" sz="1800" kern="1200" dirty="0">
+              <a:latin typeface="Sora" pitchFamily="2" charset="0"/>
+              <a:cs typeface="Sora" pitchFamily="2" charset="0"/>
+            </a:rPr>
             <a:t>You can tweak and tinker</a:t>
           </a:r>
         </a:p>
@@ -2203,14 +2342,17 @@
             <a:buNone/>
           </a:pPr>
           <a:r>
-            <a:rPr lang="en-GB" sz="1800" kern="1200" dirty="0"/>
+            <a:rPr lang="en-GB" sz="1800" kern="1200" dirty="0">
+              <a:latin typeface="Sora" pitchFamily="2" charset="0"/>
+              <a:cs typeface="Sora" pitchFamily="2" charset="0"/>
+            </a:rPr>
             <a:t>Sometimes it's all you need</a:t>
           </a:r>
         </a:p>
       </dsp:txBody>
       <dsp:txXfrm>
-        <a:off x="4110958" y="3018197"/>
-        <a:ext cx="1878330" cy="2400469"/>
+        <a:off x="5092688" y="3018197"/>
+        <a:ext cx="2326890" cy="2400469"/>
       </dsp:txXfrm>
     </dsp:sp>
     <dsp:sp modelId="{6DD1A0B4-F3B3-5C4D-B9AA-113CB158B5F3}">
@@ -2220,8 +2362,8 @@
       </dsp:nvSpPr>
       <dsp:spPr>
         <a:xfrm>
-          <a:off x="6083204" y="531029"/>
-          <a:ext cx="1878330" cy="1658112"/>
+          <a:off x="7535923" y="531029"/>
+          <a:ext cx="2326890" cy="1658112"/>
         </a:xfrm>
         <a:prstGeom prst="rect">
           <a:avLst/>
@@ -2269,18 +2411,24 @@
             </a:defRPr>
           </a:pPr>
           <a:r>
-            <a:rPr lang="en-GB" sz="2800" kern="1200"/>
+            <a:rPr lang="en-GB" sz="2800" kern="1200">
+              <a:latin typeface="Sora" pitchFamily="2" charset="0"/>
+              <a:cs typeface="Sora" pitchFamily="2" charset="0"/>
+            </a:rPr>
             <a:t>Open </a:t>
           </a:r>
           <a:r>
-            <a:rPr lang="en-GB" sz="2800" kern="1200" dirty="0"/>
+            <a:rPr lang="en-GB" sz="2800" kern="1200" dirty="0">
+              <a:latin typeface="Sora" pitchFamily="2" charset="0"/>
+              <a:cs typeface="Sora" pitchFamily="2" charset="0"/>
+            </a:rPr>
             <a:t>Source</a:t>
           </a:r>
         </a:p>
       </dsp:txBody>
       <dsp:txXfrm>
-        <a:off x="6083204" y="531029"/>
-        <a:ext cx="1878330" cy="1658112"/>
+        <a:off x="7535923" y="531029"/>
+        <a:ext cx="2326890" cy="1658112"/>
       </dsp:txXfrm>
     </dsp:sp>
     <dsp:sp modelId="{EE095B2E-B648-9B43-99A7-2F5D54B4BB4C}">
@@ -2290,7 +2438,7 @@
       </dsp:nvSpPr>
       <dsp:spPr>
         <a:xfrm>
-          <a:off x="6924833" y="2503424"/>
+          <a:off x="8601833" y="2503424"/>
           <a:ext cx="195072" cy="195072"/>
         </a:xfrm>
         <a:prstGeom prst="ellipse">
@@ -2340,8 +2488,8 @@
       </dsp:nvSpPr>
       <dsp:spPr>
         <a:xfrm>
-          <a:off x="6083204" y="3018197"/>
-          <a:ext cx="1878330" cy="2400469"/>
+          <a:off x="7535923" y="3018197"/>
+          <a:ext cx="2326890" cy="2400469"/>
         </a:xfrm>
         <a:prstGeom prst="rect">
           <a:avLst/>
@@ -2384,7 +2532,10 @@
             <a:buNone/>
           </a:pPr>
           <a:r>
-            <a:rPr lang="en-GB" sz="1800" kern="1200" dirty="0"/>
+            <a:rPr lang="en-GB" sz="1800" kern="1200" dirty="0">
+              <a:latin typeface="Sora" pitchFamily="2" charset="0"/>
+              <a:cs typeface="Sora" pitchFamily="2" charset="0"/>
+            </a:rPr>
             <a:t>Freedom to change anything</a:t>
           </a:r>
         </a:p>
@@ -2402,14 +2553,17 @@
             <a:buNone/>
           </a:pPr>
           <a:r>
-            <a:rPr lang="en-GB" sz="1800" kern="1200" dirty="0"/>
+            <a:rPr lang="en-GB" sz="1800" kern="1200" dirty="0">
+              <a:latin typeface="Sora" pitchFamily="2" charset="0"/>
+              <a:cs typeface="Sora" pitchFamily="2" charset="0"/>
+            </a:rPr>
             <a:t>Ideal if available</a:t>
           </a:r>
         </a:p>
       </dsp:txBody>
       <dsp:txXfrm>
-        <a:off x="6083204" y="3018197"/>
-        <a:ext cx="1878330" cy="2400469"/>
+        <a:off x="7535923" y="3018197"/>
+        <a:ext cx="2326890" cy="2400469"/>
       </dsp:txXfrm>
     </dsp:sp>
   </dsp:spTree>
@@ -6966,14 +7120,14 @@
           <p:nvPr>
             <p:extLst>
               <p:ext uri="{D42A27DB-BD31-4B8C-83A1-F6EECF244321}">
-                <p14:modId xmlns:p14="http://schemas.microsoft.com/office/powerpoint/2010/main" val="1030323025"/>
+                <p14:modId xmlns:p14="http://schemas.microsoft.com/office/powerpoint/2010/main" val="370054921"/>
               </p:ext>
             </p:extLst>
           </p:nvPr>
         </p:nvGraphicFramePr>
         <p:xfrm>
-          <a:off x="2032000" y="719666"/>
-          <a:ext cx="8128000" cy="5418667"/>
+          <a:off x="1275907" y="719666"/>
+          <a:ext cx="10069033" cy="5418667"/>
         </p:xfrm>
         <a:graphic>
           <a:graphicData uri="http://schemas.openxmlformats.org/drawingml/2006/diagram">
@@ -6995,8 +7149,8 @@
         </p:nvSpPr>
         <p:spPr>
           <a:xfrm>
-            <a:off x="1726609" y="1127051"/>
-            <a:ext cx="8738781" cy="818707"/>
+            <a:off x="1509823" y="1116419"/>
+            <a:ext cx="9601199" cy="818707"/>
           </a:xfrm>
           <a:prstGeom prst="rightArrow">
             <a:avLst/>
@@ -7024,9 +7178,23 @@
           <a:p>
             <a:pPr algn="ctr"/>
             <a:r>
-              <a:rPr lang="en-CH" dirty="0"/>
-              <a:t>Insight into the Product</a:t>
+              <a:rPr lang="en-CH" dirty="0">
+                <a:latin typeface="Sora" pitchFamily="2" charset="0"/>
+                <a:cs typeface="Sora" pitchFamily="2" charset="0"/>
+              </a:rPr>
+              <a:t>Usability </a:t>
             </a:r>
+            <a:r>
+              <a:rPr lang="en-CH">
+                <a:latin typeface="Sora" pitchFamily="2" charset="0"/>
+                <a:cs typeface="Sora" pitchFamily="2" charset="0"/>
+              </a:rPr>
+              <a:t>and Tweakability</a:t>
+            </a:r>
+            <a:endParaRPr lang="en-CH" dirty="0">
+              <a:latin typeface="Sora" pitchFamily="2" charset="0"/>
+              <a:cs typeface="Sora" pitchFamily="2" charset="0"/>
+            </a:endParaRPr>
           </a:p>
         </p:txBody>
       </p:sp>
@@ -7044,8 +7212,8 @@
         </p:nvSpPr>
         <p:spPr>
           <a:xfrm>
-            <a:off x="1726609" y="5064641"/>
-            <a:ext cx="8738781" cy="818707"/>
+            <a:off x="1509823" y="5283985"/>
+            <a:ext cx="9601199" cy="818707"/>
           </a:xfrm>
           <a:prstGeom prst="rightArrow">
             <a:avLst/>
@@ -7073,10 +7241,12 @@
           <a:p>
             <a:pPr algn="ctr"/>
             <a:r>
-              <a:rPr lang="en-CH"/>
+              <a:rPr lang="en-CH" dirty="0">
+                <a:latin typeface="Sora" pitchFamily="2" charset="0"/>
+                <a:cs typeface="Sora" pitchFamily="2" charset="0"/>
+              </a:rPr>
               <a:t>Optionality Value</a:t>
             </a:r>
-            <a:endParaRPr lang="en-CH" dirty="0"/>
           </a:p>
         </p:txBody>
       </p:sp>

--- a/wso2-con-2026/img/openness-ladder.pptx
+++ b/wso2-con-2026/img/openness-ladder.pptx
@@ -1257,12 +1257,18 @@
             </a:defRPr>
           </a:pPr>
           <a:r>
-            <a:rPr lang="en-GB">
+            <a:rPr lang="en-GB" dirty="0">
               <a:latin typeface="Sora" pitchFamily="2" charset="0"/>
               <a:cs typeface="Sora" pitchFamily="2" charset="0"/>
             </a:rPr>
-            <a:t>Open </a:t>
+            <a:t>Open</a:t>
           </a:r>
+          <a:br>
+            <a:rPr lang="en-GB" dirty="0">
+              <a:latin typeface="Sora" pitchFamily="2" charset="0"/>
+              <a:cs typeface="Sora" pitchFamily="2" charset="0"/>
+            </a:rPr>
+          </a:br>
           <a:r>
             <a:rPr lang="en-GB" dirty="0">
               <a:latin typeface="Sora" pitchFamily="2" charset="0"/>
@@ -1406,18 +1412,11 @@
             </a:defRPr>
           </a:pPr>
           <a:r>
-            <a:rPr lang="en-GB">
-              <a:latin typeface="Sora" pitchFamily="2" charset="0"/>
-              <a:cs typeface="Sora" pitchFamily="2" charset="0"/>
-            </a:rPr>
-            <a:t>Open </a:t>
-          </a:r>
-          <a:r>
             <a:rPr lang="en-GB" dirty="0">
               <a:latin typeface="Sora" pitchFamily="2" charset="0"/>
               <a:cs typeface="Sora" pitchFamily="2" charset="0"/>
             </a:rPr>
-            <a:t>Interfaces</a:t>
+            <a:t>Open Interfaces</a:t>
           </a:r>
         </a:p>
       </dgm:t>
@@ -1697,7 +1696,7 @@
       </dsp:nvSpPr>
       <dsp:spPr>
         <a:xfrm>
-          <a:off x="201380" y="2590891"/>
+          <a:off x="201380" y="1252133"/>
           <a:ext cx="9666271" cy="20138"/>
         </a:xfrm>
         <a:prstGeom prst="rect">
@@ -1743,8 +1742,8 @@
       </dsp:nvSpPr>
       <dsp:spPr>
         <a:xfrm>
-          <a:off x="206218" y="531029"/>
-          <a:ext cx="2326890" cy="1658112"/>
+          <a:off x="206218" y="257699"/>
+          <a:ext cx="2326890" cy="804654"/>
         </a:xfrm>
         <a:prstGeom prst="rect">
           <a:avLst/>
@@ -1769,12 +1768,12 @@
         <a:fontRef idx="minor"/>
       </dsp:style>
       <dsp:txBody>
-        <a:bodyPr spcFirstLastPara="0" vert="horz" wrap="square" lIns="35560" tIns="17780" rIns="35560" bIns="17780" numCol="1" spcCol="1270" anchor="b" anchorCtr="0">
+        <a:bodyPr spcFirstLastPara="0" vert="horz" wrap="square" lIns="33020" tIns="16510" rIns="33020" bIns="16510" numCol="1" spcCol="1270" anchor="b" anchorCtr="0">
           <a:noAutofit/>
         </a:bodyPr>
         <a:lstStyle/>
         <a:p>
-          <a:pPr marL="0" lvl="0" indent="0" algn="ctr" defTabSz="1244600">
+          <a:pPr marL="0" lvl="0" indent="0" algn="ctr" defTabSz="1155700">
             <a:lnSpc>
               <a:spcPct val="90000"/>
             </a:lnSpc>
@@ -1792,7 +1791,7 @@
             </a:defRPr>
           </a:pPr>
           <a:r>
-            <a:rPr lang="en-GB" sz="2800" kern="1200" dirty="0">
+            <a:rPr lang="en-GB" sz="2600" kern="1200" dirty="0">
               <a:latin typeface="Sora" pitchFamily="2" charset="0"/>
               <a:cs typeface="Sora" pitchFamily="2" charset="0"/>
             </a:rPr>
@@ -1801,8 +1800,8 @@
         </a:p>
       </dsp:txBody>
       <dsp:txXfrm>
-        <a:off x="206218" y="531029"/>
-        <a:ext cx="2326890" cy="1658112"/>
+        <a:off x="206218" y="257699"/>
+        <a:ext cx="2326890" cy="804654"/>
       </dsp:txXfrm>
     </dsp:sp>
     <dsp:sp modelId="{EA387B10-CE86-4642-B40A-F1B3A204E573}">
@@ -1812,8 +1811,8 @@
       </dsp:nvSpPr>
       <dsp:spPr>
         <a:xfrm>
-          <a:off x="1272127" y="2503424"/>
-          <a:ext cx="195072" cy="195072"/>
+          <a:off x="1322331" y="1214870"/>
+          <a:ext cx="94665" cy="94665"/>
         </a:xfrm>
         <a:prstGeom prst="ellipse">
           <a:avLst/>
@@ -1862,8 +1861,8 @@
       </dsp:nvSpPr>
       <dsp:spPr>
         <a:xfrm>
-          <a:off x="206218" y="3018197"/>
-          <a:ext cx="2326890" cy="2400469"/>
+          <a:off x="206218" y="1464681"/>
+          <a:ext cx="2326890" cy="1164907"/>
         </a:xfrm>
         <a:prstGeom prst="rect">
           <a:avLst/>
@@ -1936,8 +1935,8 @@
         </a:p>
       </dsp:txBody>
       <dsp:txXfrm>
-        <a:off x="206218" y="3018197"/>
-        <a:ext cx="2326890" cy="2400469"/>
+        <a:off x="206218" y="1464681"/>
+        <a:ext cx="2326890" cy="1164907"/>
       </dsp:txXfrm>
     </dsp:sp>
     <dsp:sp modelId="{D4344FD5-7B43-C444-8694-4F5EF71F997B}">
@@ -1947,8 +1946,8 @@
       </dsp:nvSpPr>
       <dsp:spPr>
         <a:xfrm>
-          <a:off x="2649453" y="531029"/>
-          <a:ext cx="2326890" cy="1658112"/>
+          <a:off x="2649453" y="257699"/>
+          <a:ext cx="2326890" cy="804654"/>
         </a:xfrm>
         <a:prstGeom prst="rect">
           <a:avLst/>
@@ -1973,12 +1972,12 @@
         <a:fontRef idx="minor"/>
       </dsp:style>
       <dsp:txBody>
-        <a:bodyPr spcFirstLastPara="0" vert="horz" wrap="square" lIns="35560" tIns="17780" rIns="35560" bIns="17780" numCol="1" spcCol="1270" anchor="b" anchorCtr="0">
+        <a:bodyPr spcFirstLastPara="0" vert="horz" wrap="square" lIns="33020" tIns="16510" rIns="33020" bIns="16510" numCol="1" spcCol="1270" anchor="b" anchorCtr="0">
           <a:noAutofit/>
         </a:bodyPr>
         <a:lstStyle/>
         <a:p>
-          <a:pPr marL="0" lvl="0" indent="0" algn="ctr" defTabSz="1244600">
+          <a:pPr marL="0" lvl="0" indent="0" algn="ctr" defTabSz="1155700">
             <a:lnSpc>
               <a:spcPct val="90000"/>
             </a:lnSpc>
@@ -1996,24 +1995,17 @@
             </a:defRPr>
           </a:pPr>
           <a:r>
-            <a:rPr lang="en-GB" sz="2800" kern="1200">
+            <a:rPr lang="en-GB" sz="2600" kern="1200" dirty="0">
               <a:latin typeface="Sora" pitchFamily="2" charset="0"/>
               <a:cs typeface="Sora" pitchFamily="2" charset="0"/>
             </a:rPr>
-            <a:t>Open </a:t>
-          </a:r>
-          <a:r>
-            <a:rPr lang="en-GB" sz="2800" kern="1200" dirty="0">
-              <a:latin typeface="Sora" pitchFamily="2" charset="0"/>
-              <a:cs typeface="Sora" pitchFamily="2" charset="0"/>
-            </a:rPr>
-            <a:t>Interfaces</a:t>
+            <a:t>Open Interfaces</a:t>
           </a:r>
         </a:p>
       </dsp:txBody>
       <dsp:txXfrm>
-        <a:off x="2649453" y="531029"/>
-        <a:ext cx="2326890" cy="1658112"/>
+        <a:off x="2649453" y="257699"/>
+        <a:ext cx="2326890" cy="804654"/>
       </dsp:txXfrm>
     </dsp:sp>
     <dsp:sp modelId="{1B3B5306-566F-5A45-A5E9-BE5D4FF79548}">
@@ -2023,8 +2015,8 @@
       </dsp:nvSpPr>
       <dsp:spPr>
         <a:xfrm>
-          <a:off x="3715362" y="2503424"/>
-          <a:ext cx="195072" cy="195072"/>
+          <a:off x="3765566" y="1214870"/>
+          <a:ext cx="94665" cy="94665"/>
         </a:xfrm>
         <a:prstGeom prst="ellipse">
           <a:avLst/>
@@ -2073,8 +2065,8 @@
       </dsp:nvSpPr>
       <dsp:spPr>
         <a:xfrm>
-          <a:off x="2649453" y="3018197"/>
-          <a:ext cx="2326890" cy="2400469"/>
+          <a:off x="2649453" y="1464681"/>
+          <a:ext cx="2326890" cy="1164907"/>
         </a:xfrm>
         <a:prstGeom prst="rect">
           <a:avLst/>
@@ -2147,8 +2139,8 @@
         </a:p>
       </dsp:txBody>
       <dsp:txXfrm>
-        <a:off x="2649453" y="3018197"/>
-        <a:ext cx="2326890" cy="2400469"/>
+        <a:off x="2649453" y="1464681"/>
+        <a:ext cx="2326890" cy="1164907"/>
       </dsp:txXfrm>
     </dsp:sp>
     <dsp:sp modelId="{F1805F63-3006-4244-B645-7E9C8D8C4429}">
@@ -2158,8 +2150,8 @@
       </dsp:nvSpPr>
       <dsp:spPr>
         <a:xfrm>
-          <a:off x="5092688" y="531029"/>
-          <a:ext cx="2326890" cy="1658112"/>
+          <a:off x="5092688" y="257699"/>
+          <a:ext cx="2326890" cy="804654"/>
         </a:xfrm>
         <a:prstGeom prst="rect">
           <a:avLst/>
@@ -2184,12 +2176,12 @@
         <a:fontRef idx="minor"/>
       </dsp:style>
       <dsp:txBody>
-        <a:bodyPr spcFirstLastPara="0" vert="horz" wrap="square" lIns="35560" tIns="17780" rIns="35560" bIns="17780" numCol="1" spcCol="1270" anchor="b" anchorCtr="0">
+        <a:bodyPr spcFirstLastPara="0" vert="horz" wrap="square" lIns="33020" tIns="16510" rIns="33020" bIns="16510" numCol="1" spcCol="1270" anchor="b" anchorCtr="0">
           <a:noAutofit/>
         </a:bodyPr>
         <a:lstStyle/>
         <a:p>
-          <a:pPr marL="0" lvl="0" indent="0" algn="ctr" defTabSz="1244600">
+          <a:pPr marL="0" lvl="0" indent="0" algn="ctr" defTabSz="1155700">
             <a:lnSpc>
               <a:spcPct val="90000"/>
             </a:lnSpc>
@@ -2207,7 +2199,7 @@
             </a:defRPr>
           </a:pPr>
           <a:r>
-            <a:rPr lang="en-GB" sz="2800" kern="1200" dirty="0">
+            <a:rPr lang="en-GB" sz="2600" kern="1200" dirty="0">
               <a:latin typeface="Sora" pitchFamily="2" charset="0"/>
               <a:cs typeface="Sora" pitchFamily="2" charset="0"/>
             </a:rPr>
@@ -2216,8 +2208,8 @@
         </a:p>
       </dsp:txBody>
       <dsp:txXfrm>
-        <a:off x="5092688" y="531029"/>
-        <a:ext cx="2326890" cy="1658112"/>
+        <a:off x="5092688" y="257699"/>
+        <a:ext cx="2326890" cy="804654"/>
       </dsp:txXfrm>
     </dsp:sp>
     <dsp:sp modelId="{34C6DBCF-013C-A049-9B36-F3539FEE2E49}">
@@ -2227,8 +2219,8 @@
       </dsp:nvSpPr>
       <dsp:spPr>
         <a:xfrm>
-          <a:off x="6158598" y="2503424"/>
-          <a:ext cx="195072" cy="195072"/>
+          <a:off x="6208801" y="1214870"/>
+          <a:ext cx="94665" cy="94665"/>
         </a:xfrm>
         <a:prstGeom prst="ellipse">
           <a:avLst/>
@@ -2277,8 +2269,8 @@
       </dsp:nvSpPr>
       <dsp:spPr>
         <a:xfrm>
-          <a:off x="5092688" y="3018197"/>
-          <a:ext cx="2326890" cy="2400469"/>
+          <a:off x="5092688" y="1464681"/>
+          <a:ext cx="2326890" cy="1164907"/>
         </a:xfrm>
         <a:prstGeom prst="rect">
           <a:avLst/>
@@ -2351,8 +2343,8 @@
         </a:p>
       </dsp:txBody>
       <dsp:txXfrm>
-        <a:off x="5092688" y="3018197"/>
-        <a:ext cx="2326890" cy="2400469"/>
+        <a:off x="5092688" y="1464681"/>
+        <a:ext cx="2326890" cy="1164907"/>
       </dsp:txXfrm>
     </dsp:sp>
     <dsp:sp modelId="{6DD1A0B4-F3B3-5C4D-B9AA-113CB158B5F3}">
@@ -2362,8 +2354,8 @@
       </dsp:nvSpPr>
       <dsp:spPr>
         <a:xfrm>
-          <a:off x="7535923" y="531029"/>
-          <a:ext cx="2326890" cy="1658112"/>
+          <a:off x="7535923" y="257699"/>
+          <a:ext cx="2326890" cy="804654"/>
         </a:xfrm>
         <a:prstGeom prst="rect">
           <a:avLst/>
@@ -2388,12 +2380,12 @@
         <a:fontRef idx="minor"/>
       </dsp:style>
       <dsp:txBody>
-        <a:bodyPr spcFirstLastPara="0" vert="horz" wrap="square" lIns="35560" tIns="17780" rIns="35560" bIns="17780" numCol="1" spcCol="1270" anchor="b" anchorCtr="0">
+        <a:bodyPr spcFirstLastPara="0" vert="horz" wrap="square" lIns="33020" tIns="16510" rIns="33020" bIns="16510" numCol="1" spcCol="1270" anchor="b" anchorCtr="0">
           <a:noAutofit/>
         </a:bodyPr>
         <a:lstStyle/>
         <a:p>
-          <a:pPr marL="0" lvl="0" indent="0" algn="ctr" defTabSz="1244600">
+          <a:pPr marL="0" lvl="0" indent="0" algn="ctr" defTabSz="1155700">
             <a:lnSpc>
               <a:spcPct val="90000"/>
             </a:lnSpc>
@@ -2411,14 +2403,20 @@
             </a:defRPr>
           </a:pPr>
           <a:r>
-            <a:rPr lang="en-GB" sz="2800" kern="1200">
+            <a:rPr lang="en-GB" sz="2600" kern="1200" dirty="0">
               <a:latin typeface="Sora" pitchFamily="2" charset="0"/>
               <a:cs typeface="Sora" pitchFamily="2" charset="0"/>
             </a:rPr>
-            <a:t>Open </a:t>
+            <a:t>Open</a:t>
           </a:r>
+          <a:br>
+            <a:rPr lang="en-GB" sz="2600" kern="1200" dirty="0">
+              <a:latin typeface="Sora" pitchFamily="2" charset="0"/>
+              <a:cs typeface="Sora" pitchFamily="2" charset="0"/>
+            </a:rPr>
+          </a:br>
           <a:r>
-            <a:rPr lang="en-GB" sz="2800" kern="1200" dirty="0">
+            <a:rPr lang="en-GB" sz="2600" kern="1200" dirty="0">
               <a:latin typeface="Sora" pitchFamily="2" charset="0"/>
               <a:cs typeface="Sora" pitchFamily="2" charset="0"/>
             </a:rPr>
@@ -2427,8 +2425,8 @@
         </a:p>
       </dsp:txBody>
       <dsp:txXfrm>
-        <a:off x="7535923" y="531029"/>
-        <a:ext cx="2326890" cy="1658112"/>
+        <a:off x="7535923" y="257699"/>
+        <a:ext cx="2326890" cy="804654"/>
       </dsp:txXfrm>
     </dsp:sp>
     <dsp:sp modelId="{EE095B2E-B648-9B43-99A7-2F5D54B4BB4C}">
@@ -2438,8 +2436,8 @@
       </dsp:nvSpPr>
       <dsp:spPr>
         <a:xfrm>
-          <a:off x="8601833" y="2503424"/>
-          <a:ext cx="195072" cy="195072"/>
+          <a:off x="8652036" y="1214870"/>
+          <a:ext cx="94665" cy="94665"/>
         </a:xfrm>
         <a:prstGeom prst="ellipse">
           <a:avLst/>
@@ -2488,8 +2486,8 @@
       </dsp:nvSpPr>
       <dsp:spPr>
         <a:xfrm>
-          <a:off x="7535923" y="3018197"/>
-          <a:ext cx="2326890" cy="2400469"/>
+          <a:off x="7535923" y="1464681"/>
+          <a:ext cx="2326890" cy="1164907"/>
         </a:xfrm>
         <a:prstGeom prst="rect">
           <a:avLst/>
@@ -2562,8 +2560,8 @@
         </a:p>
       </dsp:txBody>
       <dsp:txXfrm>
-        <a:off x="7535923" y="3018197"/>
-        <a:ext cx="2326890" cy="2400469"/>
+        <a:off x="7535923" y="1464681"/>
+        <a:ext cx="2326890" cy="1164907"/>
       </dsp:txXfrm>
     </dsp:sp>
   </dsp:spTree>
@@ -7120,14 +7118,14 @@
           <p:nvPr>
             <p:extLst>
               <p:ext uri="{D42A27DB-BD31-4B8C-83A1-F6EECF244321}">
-                <p14:modId xmlns:p14="http://schemas.microsoft.com/office/powerpoint/2010/main" val="370054921"/>
+                <p14:modId xmlns:p14="http://schemas.microsoft.com/office/powerpoint/2010/main" val="355941319"/>
               </p:ext>
             </p:extLst>
           </p:nvPr>
         </p:nvGraphicFramePr>
         <p:xfrm>
-          <a:off x="1275907" y="719666"/>
-          <a:ext cx="10069033" cy="5418667"/>
+          <a:off x="1098696" y="696829"/>
+          <a:ext cx="10069033" cy="2629589"/>
         </p:xfrm>
         <a:graphic>
           <a:graphicData uri="http://schemas.openxmlformats.org/drawingml/2006/diagram">
@@ -7137,10 +7135,10 @@
       </p:graphicFrame>
       <p:sp>
         <p:nvSpPr>
-          <p:cNvPr id="6" name="Right Arrow 5">
+          <p:cNvPr id="7" name="Right Arrow 6">
             <a:extLst>
               <a:ext uri="{FF2B5EF4-FFF2-40B4-BE49-F238E27FC236}">
-                <a16:creationId xmlns:a16="http://schemas.microsoft.com/office/drawing/2014/main" id="{9E2BBD86-5900-B2DF-57A1-56A0E05723B5}"/>
+                <a16:creationId xmlns:a16="http://schemas.microsoft.com/office/drawing/2014/main" id="{3CD775DA-F94D-A4DB-3E0A-62DF91C777D5}"/>
               </a:ext>
             </a:extLst>
           </p:cNvPr>
@@ -7149,8 +7147,8 @@
         </p:nvSpPr>
         <p:spPr>
           <a:xfrm>
-            <a:off x="1509823" y="1116419"/>
-            <a:ext cx="9601199" cy="818707"/>
+            <a:off x="1295400" y="3531583"/>
+            <a:ext cx="9688033" cy="818707"/>
           </a:xfrm>
           <a:prstGeom prst="rightArrow">
             <a:avLst/>
@@ -7182,70 +7180,7 @@
                 <a:latin typeface="Sora" pitchFamily="2" charset="0"/>
                 <a:cs typeface="Sora" pitchFamily="2" charset="0"/>
               </a:rPr>
-              <a:t>Usability </a:t>
-            </a:r>
-            <a:r>
-              <a:rPr lang="en-CH">
-                <a:latin typeface="Sora" pitchFamily="2" charset="0"/>
-                <a:cs typeface="Sora" pitchFamily="2" charset="0"/>
-              </a:rPr>
-              <a:t>and Tweakability</a:t>
-            </a:r>
-            <a:endParaRPr lang="en-CH" dirty="0">
-              <a:latin typeface="Sora" pitchFamily="2" charset="0"/>
-              <a:cs typeface="Sora" pitchFamily="2" charset="0"/>
-            </a:endParaRPr>
-          </a:p>
-        </p:txBody>
-      </p:sp>
-      <p:sp>
-        <p:nvSpPr>
-          <p:cNvPr id="7" name="Right Arrow 6">
-            <a:extLst>
-              <a:ext uri="{FF2B5EF4-FFF2-40B4-BE49-F238E27FC236}">
-                <a16:creationId xmlns:a16="http://schemas.microsoft.com/office/drawing/2014/main" id="{3CD775DA-F94D-A4DB-3E0A-62DF91C777D5}"/>
-              </a:ext>
-            </a:extLst>
-          </p:cNvPr>
-          <p:cNvSpPr/>
-          <p:nvPr/>
-        </p:nvSpPr>
-        <p:spPr>
-          <a:xfrm>
-            <a:off x="1509823" y="5283985"/>
-            <a:ext cx="9601199" cy="818707"/>
-          </a:xfrm>
-          <a:prstGeom prst="rightArrow">
-            <a:avLst/>
-          </a:prstGeom>
-        </p:spPr>
-        <p:style>
-          <a:lnRef idx="2">
-            <a:schemeClr val="accent1">
-              <a:shade val="15000"/>
-            </a:schemeClr>
-          </a:lnRef>
-          <a:fillRef idx="1">
-            <a:schemeClr val="accent1"/>
-          </a:fillRef>
-          <a:effectRef idx="0">
-            <a:schemeClr val="accent1"/>
-          </a:effectRef>
-          <a:fontRef idx="minor">
-            <a:schemeClr val="lt1"/>
-          </a:fontRef>
-        </p:style>
-        <p:txBody>
-          <a:bodyPr rtlCol="0" anchor="ctr"/>
-          <a:lstStyle/>
-          <a:p>
-            <a:pPr algn="ctr"/>
-            <a:r>
-              <a:rPr lang="en-CH" dirty="0">
-                <a:latin typeface="Sora" pitchFamily="2" charset="0"/>
-                <a:cs typeface="Sora" pitchFamily="2" charset="0"/>
-              </a:rPr>
-              <a:t>Optionality Value</a:t>
+              <a:t>Degrees of Freedom</a:t>
             </a:r>
           </a:p>
         </p:txBody>
